--- a/docs/content/ancova/ancova_activity.pptx
+++ b/docs/content/ancova/ancova_activity.pptx
@@ -13,6 +13,7 @@
     <p:sldId id="261" r:id="rId7"/>
     <p:sldId id="262" r:id="rId8"/>
     <p:sldId id="263" r:id="rId9"/>
+    <p:sldId id="264" r:id="rId10"/>
   </p:sldIdLst>
   <p:sldSz cx="9144000" cy="5143500" type="screen16x9"/>
   <p:notesSz cx="6858000" cy="9144000"/>
@@ -13032,6 +13033,708 @@
 </file>
 
 <file path=ppt/slides/slide8.xml><?xml version="1.0" encoding="utf-8"?>
+<p:sld xmlns:a="http://schemas.openxmlformats.org/drawingml/2006/main" xmlns:r="http://schemas.openxmlformats.org/officeDocument/2006/relationships" xmlns:p="http://schemas.openxmlformats.org/presentationml/2006/main">
+  <p:cSld>
+    <p:spTree>
+      <p:nvGrpSpPr>
+        <p:cNvPr id="1" name=""/>
+        <p:cNvGrpSpPr/>
+        <p:nvPr/>
+      </p:nvGrpSpPr>
+      <p:grpSpPr>
+        <a:xfrm>
+          <a:off x="0" y="0"/>
+          <a:ext cx="0" cy="0"/>
+          <a:chOff x="0" y="0"/>
+          <a:chExt cx="0" cy="0"/>
+        </a:xfrm>
+      </p:grpSpPr>
+      <p:sp>
+        <p:nvSpPr>
+          <p:cNvPr id="2" name="Title 1"/>
+          <p:cNvSpPr>
+            <a:spLocks noGrp="1"/>
+          </p:cNvSpPr>
+          <p:nvPr>
+            <p:ph type="title"/>
+          </p:nvPr>
+        </p:nvSpPr>
+        <p:spPr>
+          <a:xfrm>
+            <a:off x="0" y="0"/>
+            <a:ext cx="9144000" cy="582780"/>
+          </a:xfrm>
+        </p:spPr>
+        <p:txBody>
+          <a:bodyPr/>
+          <a:lstStyle/>
+          <a:p>
+            <a:pPr lvl="0" indent="0" marL="0">
+              <a:buNone/>
+            </a:pPr>
+            <a:r>
+              <a:rPr/>
+              <a:t>Part 4 · Take-Home Extension — Real Cricket Chirp Data</a:t>
+            </a:r>
+          </a:p>
+        </p:txBody>
+      </p:sp>
+      <p:sp>
+        <p:nvSpPr>
+          <p:cNvPr id="3" name="Content Placeholder 2"/>
+          <p:cNvSpPr>
+            <a:spLocks noGrp="1"/>
+          </p:cNvSpPr>
+          <p:nvPr>
+            <p:ph idx="1"/>
+          </p:nvPr>
+        </p:nvSpPr>
+        <p:spPr/>
+        <p:txBody>
+          <a:bodyPr/>
+          <a:lstStyle/>
+          <a:p>
+            <a:pPr lvl="0" indent="0" marL="0">
+              <a:buNone/>
+            </a:pPr>
+            <a:r>
+              <a:rPr i="1"/>
+              <a:t>Due Wednesday, November 25 — before the Multivariate Statistics class.</a:t>
+            </a:r>
+          </a:p>
+          <a:p>
+            <a:pPr lvl="0" indent="0" marL="0">
+              <a:buNone/>
+            </a:pPr>
+            <a:r>
+              <a:rPr/>
+              <a:t>Part 1 used simulated cricket data to introduce ANCOVA. Below is real data on the same question — two cricket species, chirp rate vs. temperature — from Walker’s classic study. Same workflow, real noise, and this time you decide whether standard ANCOVA is even appropriate before you run it.</a:t>
+            </a:r>
+          </a:p>
+          <a:p>
+            <a:pPr lvl="0" indent="0" marL="0">
+              <a:buNone/>
+            </a:pPr>
+            <a:r>
+              <a:rPr b="1"/>
+              <a:t>▶ Run this:</a:t>
+            </a:r>
+          </a:p>
+          <a:p>
+            <a:pPr lvl="0" indent="0">
+              <a:buNone/>
+            </a:pPr>
+            <a:r>
+              <a:rPr>
+                <a:solidFill>
+                  <a:srgbClr val="003B4F"/>
+                </a:solidFill>
+                <a:latin typeface="Courier"/>
+              </a:rPr>
+              <a:t>cricket_df &lt;- </a:t>
+            </a:r>
+            <a:r>
+              <a:rPr>
+                <a:solidFill>
+                  <a:srgbClr val="4758AB"/>
+                </a:solidFill>
+                <a:latin typeface="Courier"/>
+              </a:rPr>
+              <a:t>read_csv</a:t>
+            </a:r>
+            <a:r>
+              <a:rPr>
+                <a:solidFill>
+                  <a:srgbClr val="003B4F"/>
+                </a:solidFill>
+                <a:latin typeface="Courier"/>
+              </a:rPr>
+              <a:t>(</a:t>
+            </a:r>
+            <a:r>
+              <a:rPr>
+                <a:solidFill>
+                  <a:srgbClr val="20794D"/>
+                </a:solidFill>
+                <a:latin typeface="Courier"/>
+              </a:rPr>
+              <a:t>"data/walker_cricket_chirp_rate.csv"</a:t>
+            </a:r>
+            <a:r>
+              <a:rPr>
+                <a:solidFill>
+                  <a:srgbClr val="003B4F"/>
+                </a:solidFill>
+                <a:latin typeface="Courier"/>
+              </a:rPr>
+              <a:t>)</a:t>
+            </a:r>
+            <a:br/>
+            <a:r>
+              <a:rPr>
+                <a:solidFill>
+                  <a:srgbClr val="4758AB"/>
+                </a:solidFill>
+                <a:latin typeface="Courier"/>
+              </a:rPr>
+              <a:t>head</a:t>
+            </a:r>
+            <a:r>
+              <a:rPr>
+                <a:solidFill>
+                  <a:srgbClr val="003B4F"/>
+                </a:solidFill>
+                <a:latin typeface="Courier"/>
+              </a:rPr>
+              <a:t>(cricket_df)</a:t>
+            </a:r>
+            <a:br/>
+            <a:br/>
+            <a:r>
+              <a:rPr>
+                <a:solidFill>
+                  <a:srgbClr val="4758AB"/>
+                </a:solidFill>
+                <a:latin typeface="Courier"/>
+              </a:rPr>
+              <a:t>ggplot</a:t>
+            </a:r>
+            <a:r>
+              <a:rPr>
+                <a:solidFill>
+                  <a:srgbClr val="003B4F"/>
+                </a:solidFill>
+                <a:latin typeface="Courier"/>
+              </a:rPr>
+              <a:t>(cricket_df, </a:t>
+            </a:r>
+            <a:r>
+              <a:rPr>
+                <a:solidFill>
+                  <a:srgbClr val="4758AB"/>
+                </a:solidFill>
+                <a:latin typeface="Courier"/>
+              </a:rPr>
+              <a:t>aes</a:t>
+            </a:r>
+            <a:r>
+              <a:rPr>
+                <a:solidFill>
+                  <a:srgbClr val="003B4F"/>
+                </a:solidFill>
+                <a:latin typeface="Courier"/>
+              </a:rPr>
+              <a:t>(</a:t>
+            </a:r>
+            <a:r>
+              <a:rPr>
+                <a:solidFill>
+                  <a:srgbClr val="657422"/>
+                </a:solidFill>
+                <a:latin typeface="Courier"/>
+              </a:rPr>
+              <a:t>x =</a:t>
+            </a:r>
+            <a:r>
+              <a:rPr>
+                <a:solidFill>
+                  <a:srgbClr val="003B4F"/>
+                </a:solidFill>
+                <a:latin typeface="Courier"/>
+              </a:rPr>
+              <a:t> temp, </a:t>
+            </a:r>
+            <a:r>
+              <a:rPr>
+                <a:solidFill>
+                  <a:srgbClr val="657422"/>
+                </a:solidFill>
+                <a:latin typeface="Courier"/>
+              </a:rPr>
+              <a:t>y =</a:t>
+            </a:r>
+            <a:r>
+              <a:rPr>
+                <a:solidFill>
+                  <a:srgbClr val="003B4F"/>
+                </a:solidFill>
+                <a:latin typeface="Courier"/>
+              </a:rPr>
+              <a:t> pulse, </a:t>
+            </a:r>
+            <a:r>
+              <a:rPr>
+                <a:solidFill>
+                  <a:srgbClr val="657422"/>
+                </a:solidFill>
+                <a:latin typeface="Courier"/>
+              </a:rPr>
+              <a:t>color =</a:t>
+            </a:r>
+            <a:r>
+              <a:rPr>
+                <a:solidFill>
+                  <a:srgbClr val="003B4F"/>
+                </a:solidFill>
+                <a:latin typeface="Courier"/>
+              </a:rPr>
+              <a:t> species)) </a:t>
+            </a:r>
+            <a:r>
+              <a:rPr>
+                <a:solidFill>
+                  <a:srgbClr val="5E5E5E"/>
+                </a:solidFill>
+                <a:latin typeface="Courier"/>
+              </a:rPr>
+              <a:t>+</a:t>
+            </a:r>
+            <a:br/>
+            <a:r>
+              <a:rPr>
+                <a:solidFill>
+                  <a:srgbClr val="003B4F"/>
+                </a:solidFill>
+                <a:latin typeface="Courier"/>
+              </a:rPr>
+              <a:t>  </a:t>
+            </a:r>
+            <a:r>
+              <a:rPr>
+                <a:solidFill>
+                  <a:srgbClr val="4758AB"/>
+                </a:solidFill>
+                <a:latin typeface="Courier"/>
+              </a:rPr>
+              <a:t>geom_point</a:t>
+            </a:r>
+            <a:r>
+              <a:rPr>
+                <a:solidFill>
+                  <a:srgbClr val="003B4F"/>
+                </a:solidFill>
+                <a:latin typeface="Courier"/>
+              </a:rPr>
+              <a:t>(</a:t>
+            </a:r>
+            <a:r>
+              <a:rPr>
+                <a:solidFill>
+                  <a:srgbClr val="657422"/>
+                </a:solidFill>
+                <a:latin typeface="Courier"/>
+              </a:rPr>
+              <a:t>alpha =</a:t>
+            </a:r>
+            <a:r>
+              <a:rPr>
+                <a:solidFill>
+                  <a:srgbClr val="003B4F"/>
+                </a:solidFill>
+                <a:latin typeface="Courier"/>
+              </a:rPr>
+              <a:t> </a:t>
+            </a:r>
+            <a:r>
+              <a:rPr>
+                <a:solidFill>
+                  <a:srgbClr val="AD0000"/>
+                </a:solidFill>
+                <a:latin typeface="Courier"/>
+              </a:rPr>
+              <a:t>0.7</a:t>
+            </a:r>
+            <a:r>
+              <a:rPr>
+                <a:solidFill>
+                  <a:srgbClr val="003B4F"/>
+                </a:solidFill>
+                <a:latin typeface="Courier"/>
+              </a:rPr>
+              <a:t>) </a:t>
+            </a:r>
+            <a:r>
+              <a:rPr>
+                <a:solidFill>
+                  <a:srgbClr val="5E5E5E"/>
+                </a:solidFill>
+                <a:latin typeface="Courier"/>
+              </a:rPr>
+              <a:t>+</a:t>
+            </a:r>
+            <a:br/>
+            <a:r>
+              <a:rPr>
+                <a:solidFill>
+                  <a:srgbClr val="003B4F"/>
+                </a:solidFill>
+                <a:latin typeface="Courier"/>
+              </a:rPr>
+              <a:t>  </a:t>
+            </a:r>
+            <a:r>
+              <a:rPr>
+                <a:solidFill>
+                  <a:srgbClr val="4758AB"/>
+                </a:solidFill>
+                <a:latin typeface="Courier"/>
+              </a:rPr>
+              <a:t>geom_smooth</a:t>
+            </a:r>
+            <a:r>
+              <a:rPr>
+                <a:solidFill>
+                  <a:srgbClr val="003B4F"/>
+                </a:solidFill>
+                <a:latin typeface="Courier"/>
+              </a:rPr>
+              <a:t>(</a:t>
+            </a:r>
+            <a:r>
+              <a:rPr>
+                <a:solidFill>
+                  <a:srgbClr val="657422"/>
+                </a:solidFill>
+                <a:latin typeface="Courier"/>
+              </a:rPr>
+              <a:t>method =</a:t>
+            </a:r>
+            <a:r>
+              <a:rPr>
+                <a:solidFill>
+                  <a:srgbClr val="003B4F"/>
+                </a:solidFill>
+                <a:latin typeface="Courier"/>
+              </a:rPr>
+              <a:t> </a:t>
+            </a:r>
+            <a:r>
+              <a:rPr>
+                <a:solidFill>
+                  <a:srgbClr val="20794D"/>
+                </a:solidFill>
+                <a:latin typeface="Courier"/>
+              </a:rPr>
+              <a:t>"lm"</a:t>
+            </a:r>
+            <a:r>
+              <a:rPr>
+                <a:solidFill>
+                  <a:srgbClr val="003B4F"/>
+                </a:solidFill>
+                <a:latin typeface="Courier"/>
+              </a:rPr>
+              <a:t>, </a:t>
+            </a:r>
+            <a:r>
+              <a:rPr>
+                <a:solidFill>
+                  <a:srgbClr val="657422"/>
+                </a:solidFill>
+                <a:latin typeface="Courier"/>
+              </a:rPr>
+              <a:t>se =</a:t>
+            </a:r>
+            <a:r>
+              <a:rPr>
+                <a:solidFill>
+                  <a:srgbClr val="003B4F"/>
+                </a:solidFill>
+                <a:latin typeface="Courier"/>
+              </a:rPr>
+              <a:t> </a:t>
+            </a:r>
+            <a:r>
+              <a:rPr>
+                <a:solidFill>
+                  <a:srgbClr val="8F5902"/>
+                </a:solidFill>
+                <a:latin typeface="Courier"/>
+              </a:rPr>
+              <a:t>FALSE</a:t>
+            </a:r>
+            <a:r>
+              <a:rPr>
+                <a:solidFill>
+                  <a:srgbClr val="003B4F"/>
+                </a:solidFill>
+                <a:latin typeface="Courier"/>
+              </a:rPr>
+              <a:t>)</a:t>
+            </a:r>
+          </a:p>
+          <a:p>
+            <a:pPr lvl="0" indent="0" marL="0">
+              <a:spcBef>
+                <a:spcPts val="3000"/>
+              </a:spcBef>
+              <a:buNone/>
+            </a:pPr>
+            <a:r>
+              <a:rPr b="1"/>
+              <a:t>Your Task</a:t>
+            </a:r>
+          </a:p>
+          <a:p>
+            <a:pPr lvl="0" indent="0" marL="0">
+              <a:buNone/>
+            </a:pPr>
+            <a:r>
+              <a:rPr b="1"/>
+              <a:t>Question:</a:t>
+            </a:r>
+            <a:r>
+              <a:rPr/>
+              <a:t> Does chirp rate (</a:t>
+            </a:r>
+            <a:r>
+              <a:rPr>
+                <a:latin typeface="Courier"/>
+              </a:rPr>
+              <a:t>pulse</a:t>
+            </a:r>
+            <a:r>
+              <a:rPr/>
+              <a:t>) differ between the two cricket species after accounting for temperature (</a:t>
+            </a:r>
+            <a:r>
+              <a:rPr>
+                <a:latin typeface="Courier"/>
+              </a:rPr>
+              <a:t>temp</a:t>
+            </a:r>
+            <a:r>
+              <a:rPr/>
+              <a:t>)?</a:t>
+            </a:r>
+          </a:p>
+          <a:p>
+            <a:pPr lvl="0" indent="0" marL="0">
+              <a:buNone/>
+            </a:pPr>
+            <a:r>
+              <a:rPr/>
+              <a:t>✏️ </a:t>
+            </a:r>
+            <a:r>
+              <a:rPr b="1"/>
+              <a:t>Your turn:</a:t>
+            </a:r>
+            <a:r>
+              <a:rPr/>
+              <a:t> State your hypotheses. Test the homogeneity-of-slopes assumption yourself and decide whether standard (additive) ANCOVA is appropriate, or whether you need to keep the interaction and report separate slopes instead. Justify your choice, fit the model, check the remaining assumptions, interpret it, and report the result properly.</a:t>
+            </a:r>
+          </a:p>
+          <a:p>
+            <a:pPr lvl="0" indent="0">
+              <a:buNone/>
+            </a:pPr>
+            <a:r>
+              <a:rPr>
+                <a:latin typeface="Courier"/>
+              </a:rPr>
+              <a:t>H0 =
+________________________________________________________
+Ha =
+________________________________________________________
+Model I will use and why:
+________________________________________________________</a:t>
+            </a:r>
+          </a:p>
+          <a:p>
+            <a:pPr lvl="0" indent="0">
+              <a:buNone/>
+            </a:pPr>
+            <a:r>
+              <a:rPr>
+                <a:solidFill>
+                  <a:srgbClr val="5E5E5E"/>
+                </a:solidFill>
+                <a:latin typeface="Courier"/>
+              </a:rPr>
+              <a:t># Write your code here:</a:t>
+            </a:r>
+          </a:p>
+          <a:p>
+            <a:pPr lvl="0" indent="0">
+              <a:buNone/>
+            </a:pPr>
+            <a:r>
+              <a:rPr>
+                <a:latin typeface="Courier"/>
+              </a:rPr>
+              <a:t>Interpretation:
+________________________________________________________
+________________________________________________________</a:t>
+            </a:r>
+          </a:p>
+          <a:p>
+            <a:pPr lvl="0" indent="0" marL="0">
+              <a:spcBef>
+                <a:spcPts val="3000"/>
+              </a:spcBef>
+              <a:buNone/>
+            </a:pPr>
+            <a:r>
+              <a:rPr b="1"/>
+              <a:t>Final Figure</a:t>
+            </a:r>
+          </a:p>
+          <a:p>
+            <a:pPr lvl="0" indent="0" marL="0">
+              <a:buNone/>
+            </a:pPr>
+            <a:r>
+              <a:rPr/>
+              <a:t>Produce one publication-quality figure showing chirp rate vs. temperature by species (adjusted means with confidence intervals, or the raw regression lines — whichever fits your model from above) — proper axis labels, no default </a:t>
+            </a:r>
+            <a:r>
+              <a:rPr>
+                <a:latin typeface="Courier"/>
+              </a:rPr>
+              <a:t>ggplot</a:t>
+            </a:r>
+            <a:r>
+              <a:rPr/>
+              <a:t> grey background — and export it with </a:t>
+            </a:r>
+            <a:r>
+              <a:rPr>
+                <a:latin typeface="Courier"/>
+              </a:rPr>
+              <a:t>ggsave()</a:t>
+            </a:r>
+            <a:r>
+              <a:rPr/>
+              <a:t>.</a:t>
+            </a:r>
+          </a:p>
+          <a:p>
+            <a:pPr lvl="0" indent="0">
+              <a:buNone/>
+            </a:pPr>
+            <a:r>
+              <a:rPr>
+                <a:solidFill>
+                  <a:srgbClr val="5E5E5E"/>
+                </a:solidFill>
+                <a:latin typeface="Courier"/>
+              </a:rPr>
+              <a:t># Write your code here:</a:t>
+            </a:r>
+          </a:p>
+          <a:p>
+            <a:pPr lvl="0" indent="0" marL="1270000">
+              <a:buNone/>
+            </a:pPr>
+            <a:r>
+              <a:rPr sz="2000" b="1"/>
+              <a:t>Note</a:t>
+            </a:r>
+          </a:p>
+          <a:p>
+            <a:pPr lvl="0" indent="0" marL="1270000">
+              <a:buNone/>
+            </a:pPr>
+            <a:r>
+              <a:rPr sz="2000" b="1"/>
+              <a:t>📤 What to turn in — due Nov 25</a:t>
+            </a:r>
+          </a:p>
+          <a:p>
+            <a:pPr lvl="0" indent="0" marL="1270000">
+              <a:buNone/>
+            </a:pPr>
+            <a:r>
+              <a:rPr sz="2000"/>
+              <a:t>Your write-up should include:</a:t>
+            </a:r>
+          </a:p>
+          <a:p>
+            <a:pPr lvl="0"/>
+            <a:r>
+              <a:rPr sz="2000"/>
+              <a:t>☐ The question</a:t>
+            </a:r>
+          </a:p>
+          <a:p>
+            <a:pPr lvl="0"/>
+            <a:r>
+              <a:rPr sz="2000"/>
+              <a:t>☐ Your hypotheses</a:t>
+            </a:r>
+          </a:p>
+          <a:p>
+            <a:pPr lvl="0"/>
+            <a:r>
+              <a:rPr sz="2000"/>
+              <a:t>☐ Which model you used, and your justification for choosing it</a:t>
+            </a:r>
+          </a:p>
+          <a:p>
+            <a:pPr lvl="0"/>
+            <a:r>
+              <a:rPr sz="2000"/>
+              <a:t>☐ The code and its output</a:t>
+            </a:r>
+          </a:p>
+          <a:p>
+            <a:pPr lvl="0"/>
+            <a:r>
+              <a:rPr sz="2000"/>
+              <a:t>☐ Your interpretation of the result</a:t>
+            </a:r>
+          </a:p>
+          <a:p>
+            <a:pPr lvl="0"/>
+            <a:r>
+              <a:rPr sz="2000"/>
+              <a:t>☐ A final figure showing the result</a:t>
+            </a:r>
+          </a:p>
+          <a:p>
+            <a:pPr lvl="0" indent="0" marL="1270000">
+              <a:buNone/>
+            </a:pPr>
+            <a:r>
+              <a:rPr sz="2000" b="1"/>
+              <a:t>Note</a:t>
+            </a:r>
+          </a:p>
+          <a:p>
+            <a:pPr lvl="0" indent="0" marL="1270000">
+              <a:buNone/>
+            </a:pPr>
+            <a:r>
+              <a:rPr sz="2000" b="1"/>
+              <a:t>Reference</a:t>
+            </a:r>
+          </a:p>
+          <a:p>
+            <a:pPr lvl="0" indent="0" marL="1270000">
+              <a:buNone/>
+            </a:pPr>
+            <a:r>
+              <a:rPr sz="2000"/>
+              <a:t>Walker, T.J. (1962). Factors responsible for intraspecific variation in the calling songs of crickets. </a:t>
+            </a:r>
+            <a:r>
+              <a:rPr sz="2000" i="1"/>
+              <a:t>Evolution</a:t>
+            </a:r>
+            <a:r>
+              <a:rPr sz="2000"/>
+              <a:t>, 16, 407–428.</a:t>
+            </a:r>
+          </a:p>
+        </p:txBody>
+      </p:sp>
+    </p:spTree>
+  </p:cSld>
+</p:sld>
+</file>
+
+<file path=ppt/slides/slide9.xml><?xml version="1.0" encoding="utf-8"?>
 <p:sld xmlns:a="http://schemas.openxmlformats.org/drawingml/2006/main" xmlns:r="http://schemas.openxmlformats.org/officeDocument/2006/relationships" xmlns:p="http://schemas.openxmlformats.org/presentationml/2006/main">
   <p:cSld>
     <p:spTree>
